--- a/tesi/POWERPOINT_FINALE.pptx
+++ b/tesi/POWERPOINT_FINALE.pptx
@@ -981,7 +981,7 @@
                 <a:ea typeface="+mn-ea"/>
                 <a:cs typeface="+mn-cs"/>
               </a:rPr>
-              <a:t>È inoltre introdotta la funzione di costo di tracciamento, formulata in questo modo, che viene utilizzata per valutare l’efficacia del tracciamento.</a:t>
+              <a:t>È inoltre introdotta la funzione di costo di tracciamento, formulata in questo modo, che viene utilizzata per valutare l’efficacia dell’inseguimento del riferimento.</a:t>
             </a:r>
           </a:p>
           <a:p>
@@ -2081,7 +2081,7 @@
               <a:t>rigorsa</a:t>
             </a:r>
             <a:r>
-              <a:rPr lang="it-IT" sz="1200" kern="1200">
+              <a:rPr lang="it-IT" sz="1200" kern="1200" dirty="0">
                 <a:solidFill>
                   <a:schemeClr val="tx1"/>
                 </a:solidFill>
@@ -2090,19 +2090,7 @@
                 <a:ea typeface="+mn-ea"/>
                 <a:cs typeface="+mn-cs"/>
               </a:rPr>
-              <a:t> ‘  </a:t>
-            </a:r>
-            <a:r>
-              <a:rPr lang="it-IT" sz="1200" kern="1200" dirty="0">
-                <a:solidFill>
-                  <a:schemeClr val="tx1"/>
-                </a:solidFill>
-                <a:effectLst/>
-                <a:latin typeface="+mn-lt"/>
-                <a:ea typeface="+mn-ea"/>
-                <a:cs typeface="+mn-cs"/>
-              </a:rPr>
-              <a:t>che abilita l’utilizzo di tecniche di controllo più avanzate e mirate.</a:t>
+              <a:t> ‘  che abilita l’utilizzo di tecniche di controllo più avanzate e mirate.</a:t>
             </a:r>
           </a:p>
           <a:p>
@@ -2264,7 +2252,7 @@
                 <a:ea typeface="+mn-ea"/>
                 <a:cs typeface="+mn-cs"/>
               </a:rPr>
-              <a:t>Il contributo principale dato da questo lavoro è quello (come vedremo meglio dopo) di affrontare il problema dell’identificazione del sistema a partire dalla solo comportamento ingresso-uscita; in presenza o meno di disturbi di comunicazione,</a:t>
+              <a:t>Il contributo principale dato da questo lavoro è quello di affrontare il problema dell’identificazione del sistema a partire dalla solo comportamento ingresso-uscita; in presenza o meno di disturbi di comunicazione,</a:t>
             </a:r>
           </a:p>
           <a:p>
@@ -3201,7 +3189,7 @@
                 <a:ea typeface="+mn-ea"/>
                 <a:cs typeface="+mn-cs"/>
               </a:rPr>
-              <a:t>A questo punto, svolgiamo simulazioni dalla durata più estesa, collezionando in un dataset l’ingresso e lo stato del sistema ad ogni instante di tempo, e questo è il punto di partenza per affrontare l’identificazione.</a:t>
+              <a:t>A questo punto, svolgiamo simulazioni dalla durata più estesa, collezionando in un dataset l’ingresso e lo stato del sistema ad ogni instante di tempo, e questo costituisce il punto di partenza per affrontare l’identificazione.</a:t>
             </a:r>
           </a:p>
           <a:p>
@@ -25244,15 +25232,15 @@
 <file path=customXml/itemProps3.xml><?xml version="1.0" encoding="utf-8"?>
 <ds:datastoreItem xmlns:ds="http://schemas.openxmlformats.org/officeDocument/2006/customXml" ds:itemID="{FD727B60-781D-4ACC-B115-A22B80241F79}">
   <ds:schemaRefs>
-    <ds:schemaRef ds:uri="http://schemas.microsoft.com/office/infopath/2007/PartnerControls"/>
-    <ds:schemaRef ds:uri="http://purl.org/dc/terms/"/>
-    <ds:schemaRef ds:uri="http://schemas.openxmlformats.org/package/2006/metadata/core-properties"/>
-    <ds:schemaRef ds:uri="http://schemas.microsoft.com/office/2006/documentManagement/types"/>
     <ds:schemaRef ds:uri="http://purl.org/dc/elements/1.1/"/>
     <ds:schemaRef ds:uri="http://schemas.microsoft.com/office/2006/metadata/properties"/>
     <ds:schemaRef ds:uri="f46a9950-fd3f-4731-a2be-81d3daeaf665"/>
+    <ds:schemaRef ds:uri="http://schemas.microsoft.com/office/2006/documentManagement/types"/>
+    <ds:schemaRef ds:uri="http://purl.org/dc/terms/"/>
+    <ds:schemaRef ds:uri="http://schemas.openxmlformats.org/package/2006/metadata/core-properties"/>
+    <ds:schemaRef ds:uri="http://purl.org/dc/dcmitype/"/>
+    <ds:schemaRef ds:uri="http://schemas.microsoft.com/office/infopath/2007/PartnerControls"/>
     <ds:schemaRef ds:uri="http://www.w3.org/XML/1998/namespace"/>
-    <ds:schemaRef ds:uri="http://purl.org/dc/dcmitype/"/>
   </ds:schemaRefs>
 </ds:datastoreItem>
 </file>